--- a/examples/output/showcase.pptx
+++ b/examples/output/showcase.pptx
@@ -4646,7 +4646,7 @@
                 </a:solidFill>
                 <a:latin typeface="Inter"/>
               </a:rPr>
-              <a:t>1. Future of Work 2026 — industry survey, https://example.com/future-of-work-2026</a:t>
+              <a:t>1. Future of Work 2026, industry survey, https://example.com/future-of-work-2026</a:t>
             </a:r>
           </a:p>
           <a:p>
@@ -4662,7 +4662,7 @@
                 </a:solidFill>
                 <a:latin typeface="Inter"/>
               </a:rPr>
-              <a:t>2. Deep Work Index 2026 — engineering benchmark (2026)</a:t>
+              <a:t>2. Deep Work Index 2026, engineering benchmark (2026)</a:t>
             </a:r>
           </a:p>
         </p:txBody>

--- a/examples/output/showcase.pptx
+++ b/examples/output/showcase.pptx
@@ -230,6 +230,25 @@
         <c:majorTickMark val="out"/>
         <c:minorTickMark val="none"/>
         <c:tickLblPos val="nextTo"/>
+        <c:spPr>
+          <a:ln>
+            <a:noFill/>
+          </a:ln>
+        </c:spPr>
+        <c:txPr>
+          <a:bodyPr/>
+          <a:lstStyle/>
+          <a:p>
+            <a:pPr>
+              <a:defRPr sz="1000">
+                <a:solidFill>
+                  <a:srgbClr val="64748B"/>
+                </a:solidFill>
+                <a:latin typeface="Inter"/>
+              </a:defRPr>
+            </a:pPr>
+          </a:p>
+        </c:txPr>
         <c:crossAx val="-2113994440"/>
         <c:crosses val="autoZero"/>
         <c:auto val="1"/>
@@ -242,16 +261,48 @@
         <c:scaling/>
         <c:delete val="0"/>
         <c:axPos val="l"/>
-        <c:majorGridlines/>
+        <c:majorGridlines>
+          <c:spPr>
+            <a:ln w="9525">
+              <a:solidFill>
+                <a:srgbClr val="C9CED6"/>
+              </a:solidFill>
+            </a:ln>
+          </c:spPr>
+        </c:majorGridlines>
         <c:majorTickMark val="out"/>
         <c:minorTickMark val="none"/>
         <c:tickLblPos val="nextTo"/>
+        <c:spPr>
+          <a:ln>
+            <a:noFill/>
+          </a:ln>
+        </c:spPr>
+        <c:txPr>
+          <a:bodyPr/>
+          <a:lstStyle/>
+          <a:p>
+            <a:pPr>
+              <a:defRPr sz="1000">
+                <a:solidFill>
+                  <a:srgbClr val="64748B"/>
+                </a:solidFill>
+                <a:latin typeface="Inter"/>
+              </a:defRPr>
+            </a:pPr>
+          </a:p>
+        </c:txPr>
         <c:crossAx val="-2068027336"/>
         <c:crosses val="autoZero"/>
       </c:valAx>
     </c:plotArea>
     <c:dispBlanksAs val="gap"/>
   </c:chart>
+  <c:spPr>
+    <a:ln>
+      <a:noFill/>
+    </a:ln>
+  </c:spPr>
   <c:txPr>
     <a:bodyPr/>
     <a:lstStyle/>
@@ -389,6 +440,25 @@
         <c:majorTickMark val="out"/>
         <c:minorTickMark val="none"/>
         <c:tickLblPos val="nextTo"/>
+        <c:spPr>
+          <a:ln>
+            <a:noFill/>
+          </a:ln>
+        </c:spPr>
+        <c:txPr>
+          <a:bodyPr/>
+          <a:lstStyle/>
+          <a:p>
+            <a:pPr>
+              <a:defRPr sz="1000">
+                <a:solidFill>
+                  <a:srgbClr val="64748B"/>
+                </a:solidFill>
+                <a:latin typeface="Inter"/>
+              </a:defRPr>
+            </a:pPr>
+          </a:p>
+        </c:txPr>
         <c:crossAx val="-2113994440"/>
         <c:crosses val="autoZero"/>
         <c:auto val="1"/>
@@ -401,16 +471,48 @@
         <c:scaling/>
         <c:delete val="0"/>
         <c:axPos val="l"/>
-        <c:majorGridlines/>
+        <c:majorGridlines>
+          <c:spPr>
+            <a:ln w="9525">
+              <a:solidFill>
+                <a:srgbClr val="C9CED6"/>
+              </a:solidFill>
+            </a:ln>
+          </c:spPr>
+        </c:majorGridlines>
         <c:majorTickMark val="out"/>
         <c:minorTickMark val="none"/>
         <c:tickLblPos val="nextTo"/>
+        <c:spPr>
+          <a:ln>
+            <a:noFill/>
+          </a:ln>
+        </c:spPr>
+        <c:txPr>
+          <a:bodyPr/>
+          <a:lstStyle/>
+          <a:p>
+            <a:pPr>
+              <a:defRPr sz="1000">
+                <a:solidFill>
+                  <a:srgbClr val="64748B"/>
+                </a:solidFill>
+                <a:latin typeface="Inter"/>
+              </a:defRPr>
+            </a:pPr>
+          </a:p>
+        </c:txPr>
         <c:crossAx val="-2068027336"/>
         <c:crosses val="autoZero"/>
       </c:valAx>
     </c:plotArea>
     <c:dispBlanksAs val="gap"/>
   </c:chart>
+  <c:spPr>
+    <a:ln>
+      <a:noFill/>
+    </a:ln>
+  </c:spPr>
   <c:txPr>
     <a:bodyPr/>
     <a:lstStyle/>
@@ -3635,7 +3737,7 @@
         </p:nvSpPr>
         <p:spPr>
           <a:xfrm>
-            <a:off x="548640" y="1042415"/>
+            <a:off x="548640" y="1042416"/>
             <a:ext cx="11094415" cy="25603"/>
           </a:xfrm>
           <a:prstGeom prst="rect">
@@ -3679,8 +3781,8 @@
         </p:nvSpPr>
         <p:spPr>
           <a:xfrm>
-            <a:off x="548640" y="2414640"/>
-            <a:ext cx="11094415" cy="2353310"/>
+            <a:off x="548640" y="2360600"/>
+            <a:ext cx="11094415" cy="2481977"/>
           </a:xfrm>
           <a:prstGeom prst="rect">
             <a:avLst/>
@@ -3695,11 +3797,11 @@
           <a:p>
             <a:pPr marL="320040" indent="-228600">
               <a:spcAft>
-                <a:spcPts val="400"/>
+                <a:spcPts val="600"/>
               </a:spcAft>
             </a:pPr>
             <a:r>
-              <a:rPr sz="2380">
+              <a:rPr sz="2261">
                 <a:solidFill>
                   <a:srgbClr val="4F46E5"/>
                 </a:solidFill>
@@ -3708,7 +3810,7 @@
               <a:t>1. </a:t>
             </a:r>
             <a:r>
-              <a:rPr sz="2380" b="0" i="0">
+              <a:rPr sz="2261" b="0" i="0">
                 <a:solidFill>
                   <a:srgbClr val="0F172A"/>
                 </a:solidFill>
@@ -3720,11 +3822,11 @@
           <a:p>
             <a:pPr marL="320040" indent="-228600">
               <a:spcAft>
-                <a:spcPts val="400"/>
+                <a:spcPts val="600"/>
               </a:spcAft>
             </a:pPr>
             <a:r>
-              <a:rPr sz="2380">
+              <a:rPr sz="2261">
                 <a:solidFill>
                   <a:srgbClr val="4F46E5"/>
                 </a:solidFill>
@@ -3733,7 +3835,7 @@
               <a:t>2. </a:t>
             </a:r>
             <a:r>
-              <a:rPr sz="2380" b="0" i="0">
+              <a:rPr sz="2261" b="0" i="0">
                 <a:solidFill>
                   <a:srgbClr val="0F172A"/>
                 </a:solidFill>
@@ -3745,11 +3847,11 @@
           <a:p>
             <a:pPr marL="320040" indent="-228600">
               <a:spcAft>
-                <a:spcPts val="400"/>
+                <a:spcPts val="600"/>
               </a:spcAft>
             </a:pPr>
             <a:r>
-              <a:rPr sz="2380">
+              <a:rPr sz="2261">
                 <a:solidFill>
                   <a:srgbClr val="4F46E5"/>
                 </a:solidFill>
@@ -3758,7 +3860,7 @@
               <a:t>3. </a:t>
             </a:r>
             <a:r>
-              <a:rPr sz="2380" b="0" i="0">
+              <a:rPr sz="2261" b="0" i="0">
                 <a:solidFill>
                   <a:srgbClr val="0F172A"/>
                 </a:solidFill>
@@ -3770,11 +3872,11 @@
           <a:p>
             <a:pPr marL="320040" indent="-228600">
               <a:spcAft>
-                <a:spcPts val="400"/>
+                <a:spcPts val="600"/>
               </a:spcAft>
             </a:pPr>
             <a:r>
-              <a:rPr sz="2380">
+              <a:rPr sz="2261">
                 <a:solidFill>
                   <a:srgbClr val="4F46E5"/>
                 </a:solidFill>
@@ -3783,7 +3885,7 @@
               <a:t>4. </a:t>
             </a:r>
             <a:r>
-              <a:rPr sz="2380" b="0" i="0">
+              <a:rPr sz="2261" b="0" i="0">
                 <a:solidFill>
                   <a:srgbClr val="0F172A"/>
                 </a:solidFill>
@@ -3795,11 +3897,11 @@
           <a:p>
             <a:pPr marL="320040" indent="-228600">
               <a:spcAft>
-                <a:spcPts val="400"/>
+                <a:spcPts val="600"/>
               </a:spcAft>
             </a:pPr>
             <a:r>
-              <a:rPr sz="2380">
+              <a:rPr sz="2261">
                 <a:solidFill>
                   <a:srgbClr val="4F46E5"/>
                 </a:solidFill>
@@ -3808,7 +3910,7 @@
               <a:t>5. </a:t>
             </a:r>
             <a:r>
-              <a:rPr sz="2380" b="0" i="0">
+              <a:rPr sz="2261" b="0" i="0">
                 <a:solidFill>
                   <a:srgbClr val="0F172A"/>
                 </a:solidFill>
@@ -3887,7 +3989,7 @@
         </p:nvSpPr>
         <p:spPr>
           <a:xfrm>
-            <a:off x="548640" y="1042415"/>
+            <a:off x="548640" y="1042416"/>
             <a:ext cx="11094415" cy="25603"/>
           </a:xfrm>
           <a:prstGeom prst="rect">
@@ -3931,8 +4033,8 @@
         </p:nvSpPr>
         <p:spPr>
           <a:xfrm>
-            <a:off x="548640" y="2030475"/>
-            <a:ext cx="11094415" cy="1882648"/>
+            <a:off x="548640" y="2127878"/>
+            <a:ext cx="11094415" cy="1853027"/>
           </a:xfrm>
           <a:prstGeom prst="rect">
             <a:avLst/>
@@ -3947,11 +4049,11 @@
           <a:p>
             <a:pPr marL="320040" indent="-228600">
               <a:spcAft>
-                <a:spcPts val="400"/>
+                <a:spcPts val="600"/>
               </a:spcAft>
             </a:pPr>
             <a:r>
-              <a:rPr sz="2380">
+              <a:rPr sz="2110">
                 <a:solidFill>
                   <a:srgbClr val="4F46E5"/>
                 </a:solidFill>
@@ -3960,7 +4062,7 @@
               <a:t>•  </a:t>
             </a:r>
             <a:r>
-              <a:rPr sz="2380" b="0" i="0">
+              <a:rPr sz="2110" b="0" i="0">
                 <a:solidFill>
                   <a:srgbClr val="0F172A"/>
                 </a:solidFill>
@@ -3972,11 +4074,11 @@
           <a:p>
             <a:pPr marL="320040" indent="-228600">
               <a:spcAft>
-                <a:spcPts val="400"/>
+                <a:spcPts val="600"/>
               </a:spcAft>
             </a:pPr>
             <a:r>
-              <a:rPr sz="2380">
+              <a:rPr sz="2110">
                 <a:solidFill>
                   <a:srgbClr val="4F46E5"/>
                 </a:solidFill>
@@ -3985,7 +4087,7 @@
               <a:t>•  </a:t>
             </a:r>
             <a:r>
-              <a:rPr sz="2380" b="0" i="0">
+              <a:rPr sz="2110" b="0" i="0">
                 <a:solidFill>
                   <a:srgbClr val="0F172A"/>
                 </a:solidFill>
@@ -3997,11 +4099,11 @@
           <a:p>
             <a:pPr marL="320040" indent="-228600">
               <a:spcAft>
-                <a:spcPts val="400"/>
+                <a:spcPts val="600"/>
               </a:spcAft>
             </a:pPr>
             <a:r>
-              <a:rPr sz="2380">
+              <a:rPr sz="2110">
                 <a:solidFill>
                   <a:srgbClr val="4F46E5"/>
                 </a:solidFill>
@@ -4010,7 +4112,7 @@
               <a:t>•  </a:t>
             </a:r>
             <a:r>
-              <a:rPr sz="2380" b="0" i="0">
+              <a:rPr sz="2110" b="0" i="0">
                 <a:solidFill>
                   <a:srgbClr val="0F172A"/>
                 </a:solidFill>
@@ -4022,11 +4124,11 @@
           <a:p>
             <a:pPr marL="320040" indent="-228600">
               <a:spcAft>
-                <a:spcPts val="400"/>
+                <a:spcPts val="600"/>
               </a:spcAft>
             </a:pPr>
             <a:r>
-              <a:rPr sz="2380">
+              <a:rPr sz="2110">
                 <a:solidFill>
                   <a:srgbClr val="4F46E5"/>
                 </a:solidFill>
@@ -4035,7 +4137,7 @@
               <a:t>•  </a:t>
             </a:r>
             <a:r>
-              <a:rPr sz="2380" b="0" i="0">
+              <a:rPr sz="2110" b="0" i="0">
                 <a:solidFill>
                   <a:srgbClr val="0F172A"/>
                 </a:solidFill>
@@ -4054,8 +4156,8 @@
         </p:nvSpPr>
         <p:spPr>
           <a:xfrm>
-            <a:off x="548640" y="4498339"/>
-            <a:ext cx="11094415" cy="620903"/>
+            <a:off x="548640" y="4584409"/>
+            <a:ext cx="11094415" cy="579546"/>
           </a:xfrm>
           <a:prstGeom prst="rect">
             <a:avLst/>
@@ -4098,8 +4200,8 @@
         </p:nvSpPr>
         <p:spPr>
           <a:xfrm>
-            <a:off x="548640" y="4498339"/>
-            <a:ext cx="73152" cy="620903"/>
+            <a:off x="548640" y="4584409"/>
+            <a:ext cx="73152" cy="579546"/>
           </a:xfrm>
           <a:prstGeom prst="rect">
             <a:avLst/>
@@ -4142,8 +4244,8 @@
         </p:nvSpPr>
         <p:spPr>
           <a:xfrm>
-            <a:off x="749808" y="4626355"/>
-            <a:ext cx="10765231" cy="364871"/>
+            <a:off x="749808" y="4712425"/>
+            <a:ext cx="10765231" cy="323514"/>
           </a:xfrm>
           <a:prstGeom prst="rect">
             <a:avLst/>
@@ -4157,7 +4259,7 @@
           <a:lstStyle/>
           <a:p>
             <a:r>
-              <a:rPr sz="2210" b="0" i="0">
+              <a:rPr sz="1959" b="0" i="0">
                 <a:solidFill>
                   <a:srgbClr val="0F172A"/>
                 </a:solidFill>
@@ -4374,7 +4476,7 @@
         </p:nvSpPr>
         <p:spPr>
           <a:xfrm>
-            <a:off x="548640" y="1042415"/>
+            <a:off x="548640" y="1042416"/>
             <a:ext cx="11094415" cy="25603"/>
           </a:xfrm>
           <a:prstGeom prst="rect">
@@ -4418,8 +4520,8 @@
         </p:nvSpPr>
         <p:spPr>
           <a:xfrm>
-            <a:off x="548640" y="2809996"/>
-            <a:ext cx="11094415" cy="1411985"/>
+            <a:off x="548640" y="2744708"/>
+            <a:ext cx="11094415" cy="1567434"/>
           </a:xfrm>
           <a:prstGeom prst="rect">
             <a:avLst/>
@@ -4434,7 +4536,7 @@
           <a:p>
             <a:pPr marL="320040" indent="-228600">
               <a:spcAft>
-                <a:spcPts val="400"/>
+                <a:spcPts val="600"/>
               </a:spcAft>
             </a:pPr>
             <a:r>
@@ -4459,7 +4561,7 @@
           <a:p>
             <a:pPr marL="320040" indent="-228600">
               <a:spcAft>
-                <a:spcPts val="400"/>
+                <a:spcPts val="600"/>
               </a:spcAft>
             </a:pPr>
             <a:r>
@@ -4484,7 +4586,7 @@
           <a:p>
             <a:pPr marL="320040" indent="-228600">
               <a:spcAft>
-                <a:spcPts val="400"/>
+                <a:spcPts val="600"/>
               </a:spcAft>
             </a:pPr>
             <a:r>
@@ -4576,7 +4678,7 @@
         </p:nvSpPr>
         <p:spPr>
           <a:xfrm>
-            <a:off x="548640" y="1042415"/>
+            <a:off x="548640" y="1042416"/>
             <a:ext cx="11094415" cy="25603"/>
           </a:xfrm>
           <a:prstGeom prst="rect">
@@ -4839,7 +4941,7 @@
         </p:nvSpPr>
         <p:spPr>
           <a:xfrm>
-            <a:off x="548640" y="1042415"/>
+            <a:off x="548640" y="1042416"/>
             <a:ext cx="11094415" cy="25603"/>
           </a:xfrm>
           <a:prstGeom prst="rect">
@@ -4883,8 +4985,8 @@
         </p:nvSpPr>
         <p:spPr>
           <a:xfrm>
-            <a:off x="548640" y="2612318"/>
-            <a:ext cx="11094415" cy="1882648"/>
+            <a:off x="548640" y="2525268"/>
+            <a:ext cx="11094415" cy="2089912"/>
           </a:xfrm>
           <a:prstGeom prst="rect">
             <a:avLst/>
@@ -4899,7 +5001,7 @@
           <a:p>
             <a:pPr marL="320040" indent="-228600">
               <a:spcAft>
-                <a:spcPts val="400"/>
+                <a:spcPts val="600"/>
               </a:spcAft>
             </a:pPr>
             <a:r>
@@ -4924,7 +5026,7 @@
           <a:p>
             <a:pPr marL="320040" indent="-228600">
               <a:spcAft>
-                <a:spcPts val="400"/>
+                <a:spcPts val="600"/>
               </a:spcAft>
             </a:pPr>
             <a:r>
@@ -4949,7 +5051,7 @@
           <a:p>
             <a:pPr marL="320040" indent="-228600">
               <a:spcAft>
-                <a:spcPts val="400"/>
+                <a:spcPts val="600"/>
               </a:spcAft>
             </a:pPr>
             <a:r>
@@ -4974,7 +5076,7 @@
           <a:p>
             <a:pPr marL="320040" indent="-228600">
               <a:spcAft>
-                <a:spcPts val="400"/>
+                <a:spcPts val="600"/>
               </a:spcAft>
             </a:pPr>
             <a:r>
@@ -5066,7 +5168,7 @@
         </p:nvSpPr>
         <p:spPr>
           <a:xfrm>
-            <a:off x="548640" y="1042415"/>
+            <a:off x="548640" y="1042416"/>
             <a:ext cx="11094415" cy="25603"/>
           </a:xfrm>
           <a:prstGeom prst="rect">
@@ -5720,7 +5822,7 @@
         </p:nvSpPr>
         <p:spPr>
           <a:xfrm>
-            <a:off x="548640" y="1042415"/>
+            <a:off x="548640" y="1042416"/>
             <a:ext cx="11094415" cy="25603"/>
           </a:xfrm>
           <a:prstGeom prst="rect">
@@ -5842,7 +5944,7 @@
         </p:nvSpPr>
         <p:spPr>
           <a:xfrm>
-            <a:off x="548640" y="1042415"/>
+            <a:off x="548640" y="1042416"/>
             <a:ext cx="11094415" cy="25603"/>
           </a:xfrm>
           <a:prstGeom prst="rect">
@@ -6102,7 +6204,7 @@
         </p:nvSpPr>
         <p:spPr>
           <a:xfrm>
-            <a:off x="548640" y="1042415"/>
+            <a:off x="548640" y="1042416"/>
             <a:ext cx="11094415" cy="25603"/>
           </a:xfrm>
           <a:prstGeom prst="rect">
@@ -6147,8 +6249,8 @@
           <p:nvPr/>
         </p:nvGraphicFramePr>
         <p:xfrm>
-          <a:off x="548640" y="2750149"/>
-          <a:ext cx="6858000" cy="1316736"/>
+          <a:off x="548640" y="2878165"/>
+          <a:ext cx="6858000" cy="1011936"/>
         </p:xfrm>
         <a:graphic>
           <a:graphicData uri="http://schemas.openxmlformats.org/drawingml/2006/table">
@@ -6161,7 +6263,7 @@
                 <a:gridCol w="2286000"/>
                 <a:gridCol w="2286000"/>
               </a:tblGrid>
-              <a:tr h="329184">
+              <a:tr h="252984">
                 <a:tc>
                   <a:txBody>
                     <a:bodyPr/>
@@ -6229,7 +6331,7 @@
                   </a:tcPr>
                 </a:tc>
               </a:tr>
-              <a:tr h="329184">
+              <a:tr h="252984">
                 <a:tc>
                   <a:txBody>
                     <a:bodyPr/>
@@ -6297,7 +6399,7 @@
                   </a:tcPr>
                 </a:tc>
               </a:tr>
-              <a:tr h="329184">
+              <a:tr h="252984">
                 <a:tc>
                   <a:txBody>
                     <a:bodyPr/>
@@ -6365,7 +6467,7 @@
                   </a:tcPr>
                 </a:tc>
               </a:tr>
-              <a:tr h="329184">
+              <a:tr h="252984">
                 <a:tc>
                   <a:txBody>
                     <a:bodyPr/>
@@ -6445,7 +6547,7 @@
         </p:nvSpPr>
         <p:spPr>
           <a:xfrm>
-            <a:off x="548640" y="4103461"/>
+            <a:off x="548640" y="3926677"/>
             <a:ext cx="6858000" cy="201168"/>
           </a:xfrm>
           <a:prstGeom prst="rect">

--- a/examples/output/showcase.pptx
+++ b/examples/output/showcase.pptx
@@ -204,6 +204,7 @@
                   <a:solidFill>
                     <a:srgbClr val="0F172A"/>
                   </a:solidFill>
+                  <a:latin typeface="Sora"/>
                 </a:defRPr>
               </a:pPr>
             </a:p>
@@ -244,7 +245,7 @@
                 <a:solidFill>
                   <a:srgbClr val="64748B"/>
                 </a:solidFill>
-                <a:latin typeface="Inter"/>
+                <a:latin typeface="Sora"/>
               </a:defRPr>
             </a:pPr>
           </a:p>
@@ -287,7 +288,7 @@
                 <a:solidFill>
                   <a:srgbClr val="64748B"/>
                 </a:solidFill>
-                <a:latin typeface="Inter"/>
+                <a:latin typeface="Sora"/>
               </a:defRPr>
             </a:pPr>
           </a:p>
@@ -414,6 +415,7 @@
                   <a:solidFill>
                     <a:srgbClr val="0F172A"/>
                   </a:solidFill>
+                  <a:latin typeface="Sora"/>
                 </a:defRPr>
               </a:pPr>
             </a:p>
@@ -454,7 +456,7 @@
                 <a:solidFill>
                   <a:srgbClr val="64748B"/>
                 </a:solidFill>
-                <a:latin typeface="Inter"/>
+                <a:latin typeface="Sora"/>
               </a:defRPr>
             </a:pPr>
           </a:p>
@@ -497,7 +499,7 @@
                 <a:solidFill>
                   <a:srgbClr val="64748B"/>
                 </a:solidFill>
-                <a:latin typeface="Inter"/>
+                <a:latin typeface="Sora"/>
               </a:defRPr>
             </a:pPr>
           </a:p>
@@ -3781,8 +3783,8 @@
         </p:nvSpPr>
         <p:spPr>
           <a:xfrm>
-            <a:off x="548640" y="2360600"/>
-            <a:ext cx="11094415" cy="2481977"/>
+            <a:off x="548640" y="2596263"/>
+            <a:ext cx="11094415" cy="1920874"/>
           </a:xfrm>
           <a:prstGeom prst="rect">
             <a:avLst/>
@@ -3801,7 +3803,7 @@
               </a:spcAft>
             </a:pPr>
             <a:r>
-              <a:rPr sz="2261">
+              <a:rPr sz="1750">
                 <a:solidFill>
                   <a:srgbClr val="4F46E5"/>
                 </a:solidFill>
@@ -3810,7 +3812,7 @@
               <a:t>1. </a:t>
             </a:r>
             <a:r>
-              <a:rPr sz="2261" b="0" i="0">
+              <a:rPr sz="1750" b="0" i="0">
                 <a:solidFill>
                   <a:srgbClr val="0F172A"/>
                 </a:solidFill>
@@ -3826,7 +3828,7 @@
               </a:spcAft>
             </a:pPr>
             <a:r>
-              <a:rPr sz="2261">
+              <a:rPr sz="1750">
                 <a:solidFill>
                   <a:srgbClr val="4F46E5"/>
                 </a:solidFill>
@@ -3835,7 +3837,7 @@
               <a:t>2. </a:t>
             </a:r>
             <a:r>
-              <a:rPr sz="2261" b="0" i="0">
+              <a:rPr sz="1750" b="0" i="0">
                 <a:solidFill>
                   <a:srgbClr val="0F172A"/>
                 </a:solidFill>
@@ -3851,7 +3853,7 @@
               </a:spcAft>
             </a:pPr>
             <a:r>
-              <a:rPr sz="2261">
+              <a:rPr sz="1750">
                 <a:solidFill>
                   <a:srgbClr val="4F46E5"/>
                 </a:solidFill>
@@ -3860,7 +3862,7 @@
               <a:t>3. </a:t>
             </a:r>
             <a:r>
-              <a:rPr sz="2261" b="0" i="0">
+              <a:rPr sz="1750" b="0" i="0">
                 <a:solidFill>
                   <a:srgbClr val="0F172A"/>
                 </a:solidFill>
@@ -3876,7 +3878,7 @@
               </a:spcAft>
             </a:pPr>
             <a:r>
-              <a:rPr sz="2261">
+              <a:rPr sz="1750">
                 <a:solidFill>
                   <a:srgbClr val="4F46E5"/>
                 </a:solidFill>
@@ -3885,7 +3887,7 @@
               <a:t>4. </a:t>
             </a:r>
             <a:r>
-              <a:rPr sz="2261" b="0" i="0">
+              <a:rPr sz="1750" b="0" i="0">
                 <a:solidFill>
                   <a:srgbClr val="0F172A"/>
                 </a:solidFill>
@@ -3901,7 +3903,7 @@
               </a:spcAft>
             </a:pPr>
             <a:r>
-              <a:rPr sz="2261">
+              <a:rPr sz="1750">
                 <a:solidFill>
                   <a:srgbClr val="4F46E5"/>
                 </a:solidFill>
@@ -3910,7 +3912,7 @@
               <a:t>5. </a:t>
             </a:r>
             <a:r>
-              <a:rPr sz="2261" b="0" i="0">
+              <a:rPr sz="1750" b="0" i="0">
                 <a:solidFill>
                   <a:srgbClr val="0F172A"/>
                 </a:solidFill>
@@ -4033,8 +4035,8 @@
         </p:nvSpPr>
         <p:spPr>
           <a:xfrm>
-            <a:off x="548640" y="2127878"/>
-            <a:ext cx="11094415" cy="1853027"/>
+            <a:off x="548640" y="2283931"/>
+            <a:ext cx="11094415" cy="1536699"/>
           </a:xfrm>
           <a:prstGeom prst="rect">
             <a:avLst/>
@@ -4053,7 +4055,7 @@
               </a:spcAft>
             </a:pPr>
             <a:r>
-              <a:rPr sz="2110">
+              <a:rPr sz="1750">
                 <a:solidFill>
                   <a:srgbClr val="4F46E5"/>
                 </a:solidFill>
@@ -4062,7 +4064,7 @@
               <a:t>•  </a:t>
             </a:r>
             <a:r>
-              <a:rPr sz="2110" b="0" i="0">
+              <a:rPr sz="1750" b="0" i="0">
                 <a:solidFill>
                   <a:srgbClr val="0F172A"/>
                 </a:solidFill>
@@ -4078,7 +4080,7 @@
               </a:spcAft>
             </a:pPr>
             <a:r>
-              <a:rPr sz="2110">
+              <a:rPr sz="1750">
                 <a:solidFill>
                   <a:srgbClr val="4F46E5"/>
                 </a:solidFill>
@@ -4087,7 +4089,7 @@
               <a:t>•  </a:t>
             </a:r>
             <a:r>
-              <a:rPr sz="2110" b="0" i="0">
+              <a:rPr sz="1750" b="0" i="0">
                 <a:solidFill>
                   <a:srgbClr val="0F172A"/>
                 </a:solidFill>
@@ -4103,7 +4105,7 @@
               </a:spcAft>
             </a:pPr>
             <a:r>
-              <a:rPr sz="2110">
+              <a:rPr sz="1750">
                 <a:solidFill>
                   <a:srgbClr val="4F46E5"/>
                 </a:solidFill>
@@ -4112,7 +4114,7 @@
               <a:t>•  </a:t>
             </a:r>
             <a:r>
-              <a:rPr sz="2110" b="0" i="0">
+              <a:rPr sz="1750" b="0" i="0">
                 <a:solidFill>
                   <a:srgbClr val="0F172A"/>
                 </a:solidFill>
@@ -4128,7 +4130,7 @@
               </a:spcAft>
             </a:pPr>
             <a:r>
-              <a:rPr sz="2110">
+              <a:rPr sz="1750">
                 <a:solidFill>
                   <a:srgbClr val="4F46E5"/>
                 </a:solidFill>
@@ -4137,7 +4139,7 @@
               <a:t>•  </a:t>
             </a:r>
             <a:r>
-              <a:rPr sz="2110" b="0" i="0">
+              <a:rPr sz="1750" b="0" i="0">
                 <a:solidFill>
                   <a:srgbClr val="0F172A"/>
                 </a:solidFill>
@@ -4156,14 +4158,14 @@
         </p:nvSpPr>
         <p:spPr>
           <a:xfrm>
-            <a:off x="548640" y="4584409"/>
-            <a:ext cx="11094415" cy="579546"/>
+            <a:off x="548640" y="4424135"/>
+            <a:ext cx="11094415" cy="524319"/>
           </a:xfrm>
           <a:prstGeom prst="rect">
             <a:avLst/>
           </a:prstGeom>
           <a:solidFill>
-            <a:srgbClr val="F4F6FB"/>
+            <a:srgbClr val="F0E9DD"/>
           </a:solidFill>
           <a:ln>
             <a:noFill/>
@@ -4200,14 +4202,14 @@
         </p:nvSpPr>
         <p:spPr>
           <a:xfrm>
-            <a:off x="548640" y="4584409"/>
-            <a:ext cx="73152" cy="579546"/>
+            <a:off x="548640" y="4424135"/>
+            <a:ext cx="73152" cy="524319"/>
           </a:xfrm>
           <a:prstGeom prst="rect">
             <a:avLst/>
           </a:prstGeom>
           <a:solidFill>
-            <a:srgbClr val="64748B"/>
+            <a:srgbClr val="94630D"/>
           </a:solidFill>
           <a:ln>
             <a:noFill/>
@@ -4244,8 +4246,8 @@
         </p:nvSpPr>
         <p:spPr>
           <a:xfrm>
-            <a:off x="749808" y="4712425"/>
-            <a:ext cx="10765231" cy="323514"/>
+            <a:off x="749808" y="4552151"/>
+            <a:ext cx="10765231" cy="268287"/>
           </a:xfrm>
           <a:prstGeom prst="rect">
             <a:avLst/>
@@ -4259,7 +4261,7 @@
           <a:lstStyle/>
           <a:p>
             <a:r>
-              <a:rPr sz="1959" b="0" i="0">
+              <a:rPr sz="1625" b="0" i="0">
                 <a:solidFill>
                   <a:srgbClr val="0F172A"/>
                 </a:solidFill>
@@ -4520,8 +4522,8 @@
         </p:nvSpPr>
         <p:spPr>
           <a:xfrm>
-            <a:off x="548640" y="2744708"/>
-            <a:ext cx="11094415" cy="1567434"/>
+            <a:off x="548640" y="2918970"/>
+            <a:ext cx="11094415" cy="1152524"/>
           </a:xfrm>
           <a:prstGeom prst="rect">
             <a:avLst/>
@@ -4540,7 +4542,7 @@
               </a:spcAft>
             </a:pPr>
             <a:r>
-              <a:rPr sz="2380">
+              <a:rPr sz="1750">
                 <a:solidFill>
                   <a:srgbClr val="4F46E5"/>
                 </a:solidFill>
@@ -4549,7 +4551,7 @@
               <a:t>•  </a:t>
             </a:r>
             <a:r>
-              <a:rPr sz="2380" b="0" i="0">
+              <a:rPr sz="1750" b="0" i="0">
                 <a:solidFill>
                   <a:srgbClr val="0F172A"/>
                 </a:solidFill>
@@ -4565,7 +4567,7 @@
               </a:spcAft>
             </a:pPr>
             <a:r>
-              <a:rPr sz="2380">
+              <a:rPr sz="1750">
                 <a:solidFill>
                   <a:srgbClr val="4F46E5"/>
                 </a:solidFill>
@@ -4574,7 +4576,7 @@
               <a:t>•  </a:t>
             </a:r>
             <a:r>
-              <a:rPr sz="2380" b="0" i="0">
+              <a:rPr sz="1750" b="0" i="0">
                 <a:solidFill>
                   <a:srgbClr val="0F172A"/>
                 </a:solidFill>
@@ -4590,7 +4592,7 @@
               </a:spcAft>
             </a:pPr>
             <a:r>
-              <a:rPr sz="2380">
+              <a:rPr sz="1750">
                 <a:solidFill>
                   <a:srgbClr val="4F46E5"/>
                 </a:solidFill>
@@ -4599,7 +4601,7 @@
               <a:t>•  </a:t>
             </a:r>
             <a:r>
-              <a:rPr sz="2380" b="0" i="0">
+              <a:rPr sz="1750" b="0" i="0">
                 <a:solidFill>
                   <a:srgbClr val="0F172A"/>
                 </a:solidFill>
@@ -4736,13 +4738,13 @@
           </a:bodyPr>
           <a:lstStyle/>
           <a:p>
-            <a:pPr>
+            <a:pPr marL="310896" indent="-310896">
               <a:spcAft>
                 <a:spcPts val="600"/>
               </a:spcAft>
             </a:pPr>
             <a:r>
-              <a:rPr sz="1200" b="0" i="0">
+              <a:rPr sz="1300" b="0" i="0">
                 <a:solidFill>
                   <a:srgbClr val="64748B"/>
                 </a:solidFill>
@@ -4752,13 +4754,13 @@
             </a:r>
           </a:p>
           <a:p>
-            <a:pPr>
+            <a:pPr marL="310896" indent="-310896">
               <a:spcAft>
                 <a:spcPts val="600"/>
               </a:spcAft>
             </a:pPr>
             <a:r>
-              <a:rPr sz="1200" b="0" i="0">
+              <a:rPr sz="1300" b="0" i="0">
                 <a:solidFill>
                   <a:srgbClr val="64748B"/>
                 </a:solidFill>
@@ -4985,8 +4987,8 @@
         </p:nvSpPr>
         <p:spPr>
           <a:xfrm>
-            <a:off x="548640" y="2525268"/>
-            <a:ext cx="11094415" cy="2089912"/>
+            <a:off x="548640" y="2757617"/>
+            <a:ext cx="11094415" cy="1536699"/>
           </a:xfrm>
           <a:prstGeom prst="rect">
             <a:avLst/>
@@ -5005,7 +5007,7 @@
               </a:spcAft>
             </a:pPr>
             <a:r>
-              <a:rPr sz="2380">
+              <a:rPr sz="1750">
                 <a:solidFill>
                   <a:srgbClr val="4F46E5"/>
                 </a:solidFill>
@@ -5014,7 +5016,7 @@
               <a:t>•  </a:t>
             </a:r>
             <a:r>
-              <a:rPr sz="2380" b="0" i="0">
+              <a:rPr sz="1750" b="0" i="0">
                 <a:solidFill>
                   <a:srgbClr val="0F172A"/>
                 </a:solidFill>
@@ -5030,7 +5032,7 @@
               </a:spcAft>
             </a:pPr>
             <a:r>
-              <a:rPr sz="2380">
+              <a:rPr sz="1750">
                 <a:solidFill>
                   <a:srgbClr val="4F46E5"/>
                 </a:solidFill>
@@ -5039,7 +5041,7 @@
               <a:t>•  </a:t>
             </a:r>
             <a:r>
-              <a:rPr sz="2380" b="0" i="0">
+              <a:rPr sz="1750" b="0" i="0">
                 <a:solidFill>
                   <a:srgbClr val="0F172A"/>
                 </a:solidFill>
@@ -5055,7 +5057,7 @@
               </a:spcAft>
             </a:pPr>
             <a:r>
-              <a:rPr sz="2380">
+              <a:rPr sz="1750">
                 <a:solidFill>
                   <a:srgbClr val="4F46E5"/>
                 </a:solidFill>
@@ -5064,7 +5066,7 @@
               <a:t>•  </a:t>
             </a:r>
             <a:r>
-              <a:rPr sz="2380" b="0" i="0">
+              <a:rPr sz="1750" b="0" i="0">
                 <a:solidFill>
                   <a:srgbClr val="0F172A"/>
                 </a:solidFill>
@@ -5080,7 +5082,7 @@
               </a:spcAft>
             </a:pPr>
             <a:r>
-              <a:rPr sz="2380">
+              <a:rPr sz="1750">
                 <a:solidFill>
                   <a:srgbClr val="4F46E5"/>
                 </a:solidFill>
@@ -5089,7 +5091,7 @@
               <a:t>•  </a:t>
             </a:r>
             <a:r>
-              <a:rPr sz="2380" b="0" i="0">
+              <a:rPr sz="1750" b="0" i="0">
                 <a:solidFill>
                   <a:srgbClr val="0F172A"/>
                 </a:solidFill>
@@ -5291,7 +5293,7 @@
         <p:spPr>
           <a:xfrm>
             <a:off x="713232" y="3487155"/>
-            <a:ext cx="2272969" cy="201168"/>
+            <a:ext cx="2272969" cy="237744"/>
           </a:xfrm>
           <a:prstGeom prst="rect">
             <a:avLst/>
@@ -5305,7 +5307,7 @@
           <a:lstStyle/>
           <a:p>
             <a:r>
-              <a:rPr sz="1100" b="0" i="0">
+              <a:rPr sz="1300" b="0" i="0">
                 <a:solidFill>
                   <a:srgbClr val="64748B"/>
                 </a:solidFill>
@@ -5324,8 +5326,8 @@
         </p:nvSpPr>
         <p:spPr>
           <a:xfrm>
-            <a:off x="713232" y="3743187"/>
-            <a:ext cx="2272969" cy="182880"/>
+            <a:off x="713232" y="3779763"/>
+            <a:ext cx="2272969" cy="201168"/>
           </a:xfrm>
           <a:prstGeom prst="rect">
             <a:avLst/>
@@ -5339,7 +5341,7 @@
           <a:lstStyle/>
           <a:p>
             <a:r>
-              <a:rPr sz="1000" b="0" i="0">
+              <a:rPr sz="1200" b="0" i="0">
                 <a:solidFill>
                   <a:srgbClr val="0D9488"/>
                 </a:solidFill>
@@ -5437,7 +5439,7 @@
         <p:spPr>
           <a:xfrm>
             <a:off x="3543985" y="3487155"/>
-            <a:ext cx="2272969" cy="201168"/>
+            <a:ext cx="2272969" cy="237744"/>
           </a:xfrm>
           <a:prstGeom prst="rect">
             <a:avLst/>
@@ -5451,7 +5453,7 @@
           <a:lstStyle/>
           <a:p>
             <a:r>
-              <a:rPr sz="1100" b="0" i="0">
+              <a:rPr sz="1300" b="0" i="0">
                 <a:solidFill>
                   <a:srgbClr val="64748B"/>
                 </a:solidFill>
@@ -5470,8 +5472,8 @@
         </p:nvSpPr>
         <p:spPr>
           <a:xfrm>
-            <a:off x="3543985" y="3743187"/>
-            <a:ext cx="2272969" cy="182880"/>
+            <a:off x="3543985" y="3779763"/>
+            <a:ext cx="2272969" cy="201168"/>
           </a:xfrm>
           <a:prstGeom prst="rect">
             <a:avLst/>
@@ -5485,7 +5487,7 @@
           <a:lstStyle/>
           <a:p>
             <a:r>
-              <a:rPr sz="1000" b="0" i="0">
+              <a:rPr sz="1200" b="0" i="0">
                 <a:solidFill>
                   <a:srgbClr val="0D9488"/>
                 </a:solidFill>
@@ -5583,7 +5585,7 @@
         <p:spPr>
           <a:xfrm>
             <a:off x="6374739" y="3487155"/>
-            <a:ext cx="2272969" cy="201168"/>
+            <a:ext cx="2272969" cy="237744"/>
           </a:xfrm>
           <a:prstGeom prst="rect">
             <a:avLst/>
@@ -5597,7 +5599,7 @@
           <a:lstStyle/>
           <a:p>
             <a:r>
-              <a:rPr sz="1100" b="0" i="0">
+              <a:rPr sz="1300" b="0" i="0">
                 <a:solidFill>
                   <a:srgbClr val="64748B"/>
                 </a:solidFill>
@@ -5616,8 +5618,8 @@
         </p:nvSpPr>
         <p:spPr>
           <a:xfrm>
-            <a:off x="6374739" y="3743187"/>
-            <a:ext cx="2272969" cy="182880"/>
+            <a:off x="6374739" y="3779763"/>
+            <a:ext cx="2272969" cy="201168"/>
           </a:xfrm>
           <a:prstGeom prst="rect">
             <a:avLst/>
@@ -5631,7 +5633,7 @@
           <a:lstStyle/>
           <a:p>
             <a:r>
-              <a:rPr sz="1000" b="0" i="0">
+              <a:rPr sz="1200" b="0" i="0">
                 <a:solidFill>
                   <a:srgbClr val="0D9488"/>
                 </a:solidFill>
@@ -5729,7 +5731,7 @@
         <p:spPr>
           <a:xfrm>
             <a:off x="9205493" y="3487155"/>
-            <a:ext cx="2272969" cy="201168"/>
+            <a:ext cx="2272969" cy="237744"/>
           </a:xfrm>
           <a:prstGeom prst="rect">
             <a:avLst/>
@@ -5743,7 +5745,7 @@
           <a:lstStyle/>
           <a:p>
             <a:r>
-              <a:rPr sz="1100" b="0" i="0">
+              <a:rPr sz="1300" b="0" i="0">
                 <a:solidFill>
                   <a:srgbClr val="64748B"/>
                 </a:solidFill>
@@ -5860,15 +5862,15 @@
       </p:sp>
       <p:graphicFrame>
         <p:nvGraphicFramePr>
-          <p:cNvPr id="4" name="Chart 3"/>
+          <p:cNvPr id="4" name="Chart 3" descr="Uninterrupted focus blocks per engineer per day" title="Uninterrupted focus blocks per engineer per day"/>
           <p:cNvGraphicFramePr>
             <a:graphicFrameLocks noGrp="1"/>
           </p:cNvGraphicFramePr>
           <p:nvPr/>
         </p:nvGraphicFramePr>
         <p:xfrm>
-          <a:off x="548640" y="1674815"/>
-          <a:ext cx="11094415" cy="4114800"/>
+          <a:off x="548640" y="1298448"/>
+          <a:ext cx="11094415" cy="5010912"/>
         </p:xfrm>
         <a:graphic>
           <a:graphicData uri="http://schemas.openxmlformats.org/drawingml/2006/chart">
@@ -5982,15 +5984,15 @@
       </p:sp>
       <p:graphicFrame>
         <p:nvGraphicFramePr>
-          <p:cNvPr id="4" name="Chart 3"/>
+          <p:cNvPr id="4" name="Chart 3" descr="Median across surveyed distributed engineering orgs." title="Sync meeting share of collaboration time"/>
           <p:cNvGraphicFramePr>
             <a:graphicFrameLocks noGrp="1"/>
           </p:cNvGraphicFramePr>
           <p:nvPr/>
         </p:nvGraphicFramePr>
         <p:xfrm>
-          <a:off x="548640" y="1574962"/>
-          <a:ext cx="11094415" cy="4114800"/>
+          <a:off x="548640" y="1398300"/>
+          <a:ext cx="11094415" cy="4673315"/>
         </p:xfrm>
         <a:graphic>
           <a:graphicData uri="http://schemas.openxmlformats.org/drawingml/2006/chart">
@@ -6006,7 +6008,7 @@
         </p:nvSpPr>
         <p:spPr>
           <a:xfrm>
-            <a:off x="548640" y="5726338"/>
+            <a:off x="548640" y="6108192"/>
             <a:ext cx="11094415" cy="201168"/>
           </a:xfrm>
           <a:prstGeom prst="rect">
@@ -6242,15 +6244,15 @@
       </p:sp>
       <p:graphicFrame>
         <p:nvGraphicFramePr>
-          <p:cNvPr id="4" name="Table 3"/>
+          <p:cNvPr id="4" name="Table 3" descr="Outcomes by async maturity quartile." title="Table"/>
           <p:cNvGraphicFramePr>
             <a:graphicFrameLocks noGrp="1"/>
           </p:cNvGraphicFramePr>
           <p:nvPr/>
         </p:nvGraphicFramePr>
         <p:xfrm>
-          <a:off x="548640" y="2878165"/>
-          <a:ext cx="6858000" cy="1011936"/>
+          <a:off x="2666847" y="2878165"/>
+          <a:ext cx="6857999" cy="1011936"/>
         </p:xfrm>
         <a:graphic>
           <a:graphicData uri="http://schemas.openxmlformats.org/drawingml/2006/table">
@@ -6259,9 +6261,9 @@
                 <a:tableStyleId>{5C22544A-7EE6-4342-B048-85BDC9FD1C3A}</a:tableStyleId>
               </a:tblPr>
               <a:tblGrid>
-                <a:gridCol w="2286000"/>
-                <a:gridCol w="2286000"/>
-                <a:gridCol w="2286000"/>
+                <a:gridCol w="1978269"/>
+                <a:gridCol w="2505807"/>
+                <a:gridCol w="2373923"/>
               </a:tblGrid>
               <a:tr h="252984">
                 <a:tc>
@@ -6274,7 +6276,7 @@
                           <a:solidFill>
                             <a:srgbClr val="FFFFFF"/>
                           </a:solidFill>
-                          <a:latin typeface="Inter"/>
+                          <a:latin typeface="Sora"/>
                         </a:rPr>
                         <a:t>Async maturity</a:t>
                       </a:r>
@@ -6296,7 +6298,7 @@
                           <a:solidFill>
                             <a:srgbClr val="FFFFFF"/>
                           </a:solidFill>
-                          <a:latin typeface="Inter"/>
+                          <a:latin typeface="Sora"/>
                         </a:rPr>
                         <a:t>Voluntary attrition</a:t>
                       </a:r>
@@ -6318,7 +6320,7 @@
                           <a:solidFill>
                             <a:srgbClr val="FFFFFF"/>
                           </a:solidFill>
-                          <a:latin typeface="Inter"/>
+                          <a:latin typeface="Sora"/>
                         </a:rPr>
                         <a:t>Focus blocks / day</a:t>
                       </a:r>
@@ -6342,7 +6344,7 @@
                           <a:solidFill>
                             <a:srgbClr val="0F172A"/>
                           </a:solidFill>
-                          <a:latin typeface="Inter"/>
+                          <a:latin typeface="Sora"/>
                         </a:rPr>
                         <a:t>Top quartile</a:t>
                       </a:r>
@@ -6364,7 +6366,7 @@
                           <a:solidFill>
                             <a:srgbClr val="0F172A"/>
                           </a:solidFill>
-                          <a:latin typeface="Inter"/>
+                          <a:latin typeface="Sora"/>
                         </a:rPr>
                         <a:t>9%</a:t>
                       </a:r>
@@ -6386,7 +6388,7 @@
                           <a:solidFill>
                             <a:srgbClr val="0F172A"/>
                           </a:solidFill>
-                          <a:latin typeface="Inter"/>
+                          <a:latin typeface="Sora"/>
                         </a:rPr>
                         <a:t>3.2</a:t>
                       </a:r>
@@ -6410,7 +6412,7 @@
                           <a:solidFill>
                             <a:srgbClr val="0F172A"/>
                           </a:solidFill>
-                          <a:latin typeface="Inter"/>
+                          <a:latin typeface="Sora"/>
                         </a:rPr>
                         <a:t>Median</a:t>
                       </a:r>
@@ -6432,7 +6434,7 @@
                           <a:solidFill>
                             <a:srgbClr val="0F172A"/>
                           </a:solidFill>
-                          <a:latin typeface="Inter"/>
+                          <a:latin typeface="Sora"/>
                         </a:rPr>
                         <a:t>13%</a:t>
                       </a:r>
@@ -6454,7 +6456,7 @@
                           <a:solidFill>
                             <a:srgbClr val="0F172A"/>
                           </a:solidFill>
-                          <a:latin typeface="Inter"/>
+                          <a:latin typeface="Sora"/>
                         </a:rPr>
                         <a:t>2.3</a:t>
                       </a:r>
@@ -6478,7 +6480,7 @@
                           <a:solidFill>
                             <a:srgbClr val="0F172A"/>
                           </a:solidFill>
-                          <a:latin typeface="Inter"/>
+                          <a:latin typeface="Sora"/>
                         </a:rPr>
                         <a:t>Bottom quartile</a:t>
                       </a:r>
@@ -6500,7 +6502,7 @@
                           <a:solidFill>
                             <a:srgbClr val="0F172A"/>
                           </a:solidFill>
-                          <a:latin typeface="Inter"/>
+                          <a:latin typeface="Sora"/>
                         </a:rPr>
                         <a:t>17%</a:t>
                       </a:r>
@@ -6522,7 +6524,7 @@
                           <a:solidFill>
                             <a:srgbClr val="0F172A"/>
                           </a:solidFill>
-                          <a:latin typeface="Inter"/>
+                          <a:latin typeface="Sora"/>
                         </a:rPr>
                         <a:t>1.4</a:t>
                       </a:r>
@@ -6547,7 +6549,7 @@
         </p:nvSpPr>
         <p:spPr>
           <a:xfrm>
-            <a:off x="548640" y="3926677"/>
+            <a:off x="2666847" y="3926677"/>
             <a:ext cx="6858000" cy="201168"/>
           </a:xfrm>
           <a:prstGeom prst="rect">
